--- a/Topic_B/Exam_Practice/TB-L12_Writing_Workshop_Topic_B_Review_and_Four_Skills_Assessment.pptx
+++ b/Topic_B/Exam_Practice/TB-L12_Writing_Workshop_Topic_B_Review_and_Four_Skills_Assessment.pptx
@@ -784,7 +784,11 @@
           <a:lstStyle/>
           <a:p>
             <a:r>
-              <a:rPr lang="en-US" dirty="0"/>
+              <a:rPr lang="ar-SA" dirty="0">
+                <a:latin typeface="Amiri" pitchFamily="2" charset="-78"/>
+                <a:ea typeface="Amiri" pitchFamily="2" charset="-78"/>
+                <a:cs typeface="Amiri" pitchFamily="2" charset="-78"/>
+              </a:rPr>
               <a:t>Q3 (3 min to choose and read). Title (أ) suits Core and Develop; title (ب) suits Stretch.</a:t>
             </a:r>
             <a:endParaRPr lang="en-US" dirty="0"/>
@@ -1403,7 +1407,11 @@
           <a:lstStyle/>
           <a:p>
             <a:r>
-              <a:rPr lang="en-US" dirty="0"/>
+              <a:rPr lang="ar-SA" dirty="0">
+                <a:latin typeface="Amiri" pitchFamily="2" charset="-78"/>
+                <a:ea typeface="Amiri" pitchFamily="2" charset="-78"/>
+                <a:cs typeface="Amiri" pitchFamily="2" charset="-78"/>
+              </a:rPr>
               <a:t>WELCOME (1 min) — while students join.
 • Greet each student by name as they arrive: السَّلَامُ عَلَيْكُمْ. Take the register (Pastoral Tracker: attendance 0/1).
 • 2-MINUTE CHECK-IN (SEND training): a private chat to any student who seemed unsettled last lesson — “Are you okay today? 👍 / 👎”.
@@ -1936,7 +1944,11 @@
           <a:lstStyle/>
           <a:p>
             <a:r>
-              <a:rPr lang="en-US" dirty="0"/>
+              <a:rPr lang="ar-SA" dirty="0">
+                <a:latin typeface="Amiri" pitchFamily="2" charset="-78"/>
+                <a:ea typeface="Amiri" pitchFamily="2" charset="-78"/>
+                <a:cs typeface="Amiri" pitchFamily="2" charset="-78"/>
+              </a:rPr>
               <a:t>Question words: مَتَى (when) · أَيْنَ (where) · صِفْ (describe) · مَنْ (who) · مَاذَا (what) · اطْلُبْ (ask) — bullet 2 is FUTURE, bullet 3 is PAST.</a:t>
             </a:r>
             <a:endParaRPr lang="en-US" dirty="0"/>
@@ -2508,6 +2520,7 @@
                   <a:srgbClr val="D4AF37"/>
                 </a:solidFill>
                 <a:latin typeface="Amiri" pitchFamily="2" charset="-78"/>
+                <a:ea typeface="Amiri" pitchFamily="2" charset="-78"/>
                 <a:cs typeface="Amiri" pitchFamily="2" charset="-78"/>
               </a:rPr>
               <a:t>م</a:t>
@@ -2714,6 +2727,7 @@
                   <a:srgbClr val="D4AF37"/>
                 </a:solidFill>
                 <a:latin typeface="Amiri" pitchFamily="2" charset="-78"/>
+                <a:ea typeface="Amiri" pitchFamily="2" charset="-78"/>
                 <a:cs typeface="Amiri" pitchFamily="2" charset="-78"/>
               </a:rPr>
               <a:t>وَرْشَةُ الكِتَابَةِ — امْتِحَانٌ تَجْرِيبِيٌّ</a:t>
@@ -3171,6 +3185,7 @@
                   <a:srgbClr val="D4AF37"/>
                 </a:solidFill>
                 <a:latin typeface="Amiri" pitchFamily="2" charset="-78"/>
+                <a:ea typeface="Amiri" pitchFamily="2" charset="-78"/>
                 <a:cs typeface="Amiri" pitchFamily="2" charset="-78"/>
               </a:rPr>
               <a:t>م</a:t>
@@ -3491,6 +3506,7 @@
                   <a:srgbClr val="8A6D1E"/>
                 </a:solidFill>
                 <a:latin typeface="Amiri" pitchFamily="2" charset="-78"/>
+                <a:ea typeface="Amiri" pitchFamily="2" charset="-78"/>
                 <a:cs typeface="Amiri" pitchFamily="2" charset="-78"/>
               </a:rPr>
               <a:t>نَمُوذَجُ الإِجَابَةِ</a:t>
@@ -3604,6 +3620,7 @@
                   <a:srgbClr val="1F2A37"/>
                 </a:solidFill>
                 <a:latin typeface="Amiri" pitchFamily="2" charset="-78"/>
+                <a:ea typeface="Amiri" pitchFamily="2" charset="-78"/>
                 <a:cs typeface="Amiri" pitchFamily="2" charset="-78"/>
               </a:rPr>
               <a:t>عَزِيزِي مَالِكٌ،</a:t>
@@ -3623,6 +3640,7 @@
                   <a:srgbClr val="1F2A37"/>
                 </a:solidFill>
                 <a:latin typeface="Amiri" pitchFamily="2" charset="-78"/>
+                <a:ea typeface="Amiri" pitchFamily="2" charset="-78"/>
                 <a:cs typeface="Amiri" pitchFamily="2" charset="-78"/>
               </a:rPr>
               <a:t>كَيْفَ حَالُكَ؟ أَدْعُوكَ إِلَى حَفْلَةِ عِيدِ مِيلَادِي السَّادِسَ عَشَرَ يَوْمَ السَّبْتِ فِي السَّاعَةِ الخَامِسَةِ. الحَفْلَةُ فِي بَيْتِنَا الجَدِيدِ، وَهُوَ بِجَانِبِ المَكْتَبَةِ العَامَّةِ. سَيَأْتِي أَصْدِقَائِي مِنَ المَدْرَسَةِ وَأَوْلَادُ عَمِّي أَيْضًا. سَنَأْكُلُ البِيتْزَا، ثُمَّ سَنَلْعَبُ كُرَةَ القَدَمِ فِي الحَدِيقَةِ. أَمْسِ اشْتَرَيْتُ قَمِيصًا أَزْرَقَ جَدِيدًا لِلْحَفْلَةِ. لَا تُحْضِرْ هَدِيَّةً، أُرِيدُ أَنْ تَأْتِيَ فَقَطْ! إِذَا لَمْ تَسْتَطِعْ، فَاتَّصِلْ بِي.</a:t>
@@ -3642,6 +3660,7 @@
                   <a:srgbClr val="1F2A37"/>
                 </a:solidFill>
                 <a:latin typeface="Amiri" pitchFamily="2" charset="-78"/>
+                <a:ea typeface="Amiri" pitchFamily="2" charset="-78"/>
                 <a:cs typeface="Amiri" pitchFamily="2" charset="-78"/>
               </a:rPr>
               <a:t>مَعَ السَّلَامَةِ،</a:t>
@@ -3661,6 +3680,7 @@
                   <a:srgbClr val="1F2A37"/>
                 </a:solidFill>
                 <a:latin typeface="Amiri" pitchFamily="2" charset="-78"/>
+                <a:ea typeface="Amiri" pitchFamily="2" charset="-78"/>
                 <a:cs typeface="Amiri" pitchFamily="2" charset="-78"/>
               </a:rPr>
               <a:t>يُوسُفُ</a:t>
@@ -3824,11 +3844,12 @@
               <a:buNone/>
             </a:pPr>
             <a:r>
-              <a:rPr lang="en-US" sz="950" b="1" dirty="0">
+              <a:rPr lang="ar-SA" sz="950" b="1" dirty="0">
                 <a:solidFill>
                   <a:srgbClr val="FFFFFF"/>
                 </a:solidFill>
                 <a:latin typeface="Calibri" pitchFamily="34" charset="0"/>
+                <a:ea typeface="Amiri" pitchFamily="2" charset="-78"/>
                 <a:cs typeface="Amiri" pitchFamily="2" charset="-78"/>
               </a:rPr>
               <a:t>أَدْعُوكَ إِلَى</a:t>
@@ -3889,11 +3910,12 @@
               <a:buNone/>
             </a:pPr>
             <a:r>
-              <a:rPr lang="en-US" sz="950" b="1" dirty="0">
+              <a:rPr lang="ar-SA" sz="950" b="1" dirty="0">
                 <a:solidFill>
                   <a:srgbClr val="FFFFFF"/>
                 </a:solidFill>
                 <a:latin typeface="Calibri" pitchFamily="34" charset="0"/>
+                <a:ea typeface="Amiri" pitchFamily="2" charset="-78"/>
                 <a:cs typeface="Amiri" pitchFamily="2" charset="-78"/>
               </a:rPr>
               <a:t>بِجَانِبِ المَكْتَبَةِ</a:t>
@@ -3954,11 +3976,12 @@
               <a:buNone/>
             </a:pPr>
             <a:r>
-              <a:rPr lang="en-US" sz="950" b="1" dirty="0">
+              <a:rPr lang="ar-SA" sz="950" b="1" dirty="0">
                 <a:solidFill>
                   <a:srgbClr val="FFFFFF"/>
                 </a:solidFill>
                 <a:latin typeface="Calibri" pitchFamily="34" charset="0"/>
+                <a:ea typeface="Amiri" pitchFamily="2" charset="-78"/>
                 <a:cs typeface="Amiri" pitchFamily="2" charset="-78"/>
               </a:rPr>
               <a:t>قَمِيصًا أَزْرَقَ</a:t>
@@ -4019,11 +4042,12 @@
               <a:buNone/>
             </a:pPr>
             <a:r>
-              <a:rPr lang="en-US" sz="950" b="1" dirty="0">
+              <a:rPr lang="ar-SA" sz="950" b="1" dirty="0">
                 <a:solidFill>
                   <a:srgbClr val="FFFFFF"/>
                 </a:solidFill>
                 <a:latin typeface="Calibri" pitchFamily="34" charset="0"/>
+                <a:ea typeface="Amiri" pitchFamily="2" charset="-78"/>
                 <a:cs typeface="Amiri" pitchFamily="2" charset="-78"/>
               </a:rPr>
               <a:t>إِذَا لَمْ تَسْتَطِعْ</a:t>
@@ -4157,6 +4181,7 @@
                   <a:srgbClr val="D4AF37"/>
                 </a:solidFill>
                 <a:latin typeface="Amiri" pitchFamily="2" charset="-78"/>
+                <a:ea typeface="Amiri" pitchFamily="2" charset="-78"/>
                 <a:cs typeface="Amiri" pitchFamily="2" charset="-78"/>
               </a:rPr>
               <a:t>م</a:t>
@@ -4477,6 +4502,7 @@
                   <a:srgbClr val="8A6D1E"/>
                 </a:solidFill>
                 <a:latin typeface="Amiri" pitchFamily="2" charset="-78"/>
+                <a:ea typeface="Amiri" pitchFamily="2" charset="-78"/>
                 <a:cs typeface="Amiri" pitchFamily="2" charset="-78"/>
               </a:rPr>
               <a:t>نَمُوذَجُ الإِجَابَةِ</a:t>
@@ -4590,6 +4616,7 @@
                   <a:srgbClr val="1F2A37"/>
                 </a:solidFill>
                 <a:latin typeface="Amiri" pitchFamily="2" charset="-78"/>
+                <a:ea typeface="Amiri" pitchFamily="2" charset="-78"/>
                 <a:cs typeface="Amiri" pitchFamily="2" charset="-78"/>
               </a:rPr>
               <a:t>عَزِيزِي مَالِكٌ،</a:t>
@@ -4609,6 +4636,7 @@
                   <a:srgbClr val="1F2A37"/>
                 </a:solidFill>
                 <a:latin typeface="Amiri" pitchFamily="2" charset="-78"/>
+                <a:ea typeface="Amiri" pitchFamily="2" charset="-78"/>
                 <a:cs typeface="Amiri" pitchFamily="2" charset="-78"/>
               </a:rPr>
               <a:t>تَحِيَّةً طَيِّبَةً، وَبَعْدُ، فَيُسْعِدُنِي أَنْ أَدْعُوَكَ إِلَى حَفْلَةِ عِيدِ مِيلَادِيَ السَّادِسَ عَشَرَ، يَوْمَ السَّبْتِ القَادِمِ فِي السَّاعَةِ الخَامِسَةِ مَسَاءً. سَتَكُونُ الحَفْلَةُ فِي بَيْتِنَا الجَدِيدِ، الَّذِي يَقَعُ بِجَانِبِ المَكْتَبَةِ العَامَّةِ، وَفِيهِ حَدِيقَةٌ وَاسِعَةٌ تَكْفِي لِمُبَارَاةٍ صَغِيرَةٍ! سَيَحْضُرُ زُمَلَاؤُنَا فِي الصَّفِّ، بِالإِضَافَةِ إِلَى أَوْلَادِ عَمِّي القَادِمِينَ مِنْ لِيدْزَ. أَمْسِ قَضَيْتُ اليَوْمَ مَعَ أُمِّي فِي التَّسَوُّقِ، فَاشْتَرَيْنَا الزِّينَةَ وَالأَطْبَاقَ، وَاخْتَرْتُ قَمِيصًا أَزْرَقَ غَامِقًا لِلْحَفْلَةِ. أَرْجُو أَلَّا تُحْضِرَ هَدِيَّةً، فَحُضُورُكَ يَكْفِينِي، وَإِذَا لَمْ تَسْتَطِعِ المَجِيءَ، فَأَخْبِرْنِي قَبْلَ يَوْمِ الخَمِيسِ.</a:t>
@@ -4628,6 +4656,7 @@
                   <a:srgbClr val="1F2A37"/>
                 </a:solidFill>
                 <a:latin typeface="Amiri" pitchFamily="2" charset="-78"/>
+                <a:ea typeface="Amiri" pitchFamily="2" charset="-78"/>
                 <a:cs typeface="Amiri" pitchFamily="2" charset="-78"/>
               </a:rPr>
               <a:t>مَعَ أَطْيَبِ التَّحِيَّاتِ،</a:t>
@@ -4647,6 +4676,7 @@
                   <a:srgbClr val="1F2A37"/>
                 </a:solidFill>
                 <a:latin typeface="Amiri" pitchFamily="2" charset="-78"/>
+                <a:ea typeface="Amiri" pitchFamily="2" charset="-78"/>
                 <a:cs typeface="Amiri" pitchFamily="2" charset="-78"/>
               </a:rPr>
               <a:t>يُوسُفُ</a:t>
@@ -4810,11 +4840,12 @@
               <a:buNone/>
             </a:pPr>
             <a:r>
-              <a:rPr lang="en-US" sz="950" b="1" dirty="0">
+              <a:rPr lang="ar-SA" sz="950" b="1" dirty="0">
                 <a:solidFill>
                   <a:srgbClr val="FFFFFF"/>
                 </a:solidFill>
                 <a:latin typeface="Calibri" pitchFamily="34" charset="0"/>
+                <a:ea typeface="Amiri" pitchFamily="2" charset="-78"/>
                 <a:cs typeface="Amiri" pitchFamily="2" charset="-78"/>
               </a:rPr>
               <a:t>يُسْعِدُنِي أَنْ أَدْعُوَكَ</a:t>
@@ -4875,11 +4906,12 @@
               <a:buNone/>
             </a:pPr>
             <a:r>
-              <a:rPr lang="en-US" sz="950" b="1" dirty="0">
+              <a:rPr lang="ar-SA" sz="950" b="1" dirty="0">
                 <a:solidFill>
                   <a:srgbClr val="FFFFFF"/>
                 </a:solidFill>
                 <a:latin typeface="Calibri" pitchFamily="34" charset="0"/>
+                <a:ea typeface="Amiri" pitchFamily="2" charset="-78"/>
                 <a:cs typeface="Amiri" pitchFamily="2" charset="-78"/>
               </a:rPr>
               <a:t>الَّذِي يَقَعُ بِجَانِبِ</a:t>
@@ -4940,11 +4972,12 @@
               <a:buNone/>
             </a:pPr>
             <a:r>
-              <a:rPr lang="en-US" sz="950" b="1" dirty="0">
+              <a:rPr lang="ar-SA" sz="950" b="1" dirty="0">
                 <a:solidFill>
                   <a:srgbClr val="FFFFFF"/>
                 </a:solidFill>
                 <a:latin typeface="Calibri" pitchFamily="34" charset="0"/>
+                <a:ea typeface="Amiri" pitchFamily="2" charset="-78"/>
                 <a:cs typeface="Amiri" pitchFamily="2" charset="-78"/>
               </a:rPr>
               <a:t>بِالإِضَافَةِ إِلَى</a:t>
@@ -5005,11 +5038,12 @@
               <a:buNone/>
             </a:pPr>
             <a:r>
-              <a:rPr lang="en-US" sz="950" b="1" dirty="0">
+              <a:rPr lang="ar-SA" sz="950" b="1" dirty="0">
                 <a:solidFill>
                   <a:srgbClr val="FFFFFF"/>
                 </a:solidFill>
                 <a:latin typeface="Calibri" pitchFamily="34" charset="0"/>
+                <a:ea typeface="Amiri" pitchFamily="2" charset="-78"/>
                 <a:cs typeface="Amiri" pitchFamily="2" charset="-78"/>
               </a:rPr>
               <a:t>أَرْجُو أَلَّا تُحْضِرَ</a:t>
@@ -5143,6 +5177,7 @@
                   <a:srgbClr val="D4AF37"/>
                 </a:solidFill>
                 <a:latin typeface="Amiri" pitchFamily="2" charset="-78"/>
+                <a:ea typeface="Amiri" pitchFamily="2" charset="-78"/>
                 <a:cs typeface="Amiri" pitchFamily="2" charset="-78"/>
               </a:rPr>
               <a:t>م</a:t>
@@ -5463,6 +5498,7 @@
                   <a:srgbClr val="8A6D1E"/>
                 </a:solidFill>
                 <a:latin typeface="Amiri" pitchFamily="2" charset="-78"/>
+                <a:ea typeface="Amiri" pitchFamily="2" charset="-78"/>
                 <a:cs typeface="Amiri" pitchFamily="2" charset="-78"/>
               </a:rPr>
               <a:t>اخْتَرْ عُنْوَانًا وَاحِدًا</a:t>
@@ -5743,6 +5779,7 @@
                   <a:srgbClr val="1B3B6F"/>
                 </a:solidFill>
                 <a:latin typeface="Amiri" pitchFamily="2" charset="-78"/>
+                <a:ea typeface="Amiri" pitchFamily="2" charset="-78"/>
                 <a:cs typeface="Amiri" pitchFamily="2" charset="-78"/>
               </a:rPr>
               <a:t>هٰذِهِ أَنَا</a:t>
@@ -5781,6 +5818,7 @@
                   <a:srgbClr val="1B3B6F"/>
                 </a:solidFill>
                 <a:latin typeface="Amiri" pitchFamily="2" charset="-78"/>
+                <a:ea typeface="Amiri" pitchFamily="2" charset="-78"/>
                 <a:cs typeface="Amiri" pitchFamily="2" charset="-78"/>
               </a:rPr>
               <a:t>(أ)</a:t>
@@ -5887,6 +5925,7 @@
                   <a:srgbClr val="1B3B6F"/>
                 </a:solidFill>
                 <a:latin typeface="Amiri" pitchFamily="2" charset="-78"/>
+                <a:ea typeface="Amiri" pitchFamily="2" charset="-78"/>
                 <a:cs typeface="Amiri" pitchFamily="2" charset="-78"/>
               </a:rPr>
               <a:t>مَعْلُومَاتُكَ وَشَكْلُكَ وَشَخْصِيَّتُكَ · أُسْرَتُكَ وَبَيْتُكَ وَهِوَايَاتُكَ · أَجْمَلُ ذِكْرَى · خُطَطُكَ وَأَحْلَامُكَ</a:t>
@@ -6018,6 +6057,7 @@
                   <a:srgbClr val="1B3B6F"/>
                 </a:solidFill>
                 <a:latin typeface="Amiri" pitchFamily="2" charset="-78"/>
+                <a:ea typeface="Amiri" pitchFamily="2" charset="-78"/>
                 <a:cs typeface="Amiri" pitchFamily="2" charset="-78"/>
               </a:rPr>
               <a:t>الحَيَاةُ العَائِلِيَّةُ تَتَغَيَّرُ</a:t>
@@ -6056,6 +6096,7 @@
                   <a:srgbClr val="1B3B6F"/>
                 </a:solidFill>
                 <a:latin typeface="Amiri" pitchFamily="2" charset="-78"/>
+                <a:ea typeface="Amiri" pitchFamily="2" charset="-78"/>
                 <a:cs typeface="Amiri" pitchFamily="2" charset="-78"/>
               </a:rPr>
               <a:t>(ب)</a:t>
@@ -6159,6 +6200,7 @@
                   <a:srgbClr val="1B3B6F"/>
                 </a:solidFill>
                 <a:latin typeface="Amiri" pitchFamily="2" charset="-78"/>
+                <a:ea typeface="Amiri" pitchFamily="2" charset="-78"/>
                 <a:cs typeface="Amiri" pitchFamily="2" charset="-78"/>
               </a:rPr>
               <a:t>كَيْفَ تَغَيَّرَتِ العَائِلَةُ؟ · المَاضِي وَالحَاضِرُ · تَجْرِبَةٌ مِنْ أُسْرَتِكَ · رَأْيُكَ وَاقْتِرَاحُكَ</a:t>
@@ -6358,6 +6400,7 @@
                   <a:srgbClr val="D4AF37"/>
                 </a:solidFill>
                 <a:latin typeface="Amiri" pitchFamily="2" charset="-78"/>
+                <a:ea typeface="Amiri" pitchFamily="2" charset="-78"/>
                 <a:cs typeface="Amiri" pitchFamily="2" charset="-78"/>
               </a:rPr>
               <a:t>م</a:t>
@@ -6678,6 +6721,7 @@
                   <a:srgbClr val="8A6D1E"/>
                 </a:solidFill>
                 <a:latin typeface="Amiri" pitchFamily="2" charset="-78"/>
+                <a:ea typeface="Amiri" pitchFamily="2" charset="-78"/>
                 <a:cs typeface="Amiri" pitchFamily="2" charset="-78"/>
               </a:rPr>
               <a:t>خُطَّةُ الكِتَابَةِ</a:t>
@@ -7302,6 +7346,7 @@
                   <a:srgbClr val="1B3B6F"/>
                 </a:solidFill>
                 <a:latin typeface="Amiri" pitchFamily="2" charset="-78"/>
+                <a:ea typeface="Amiri" pitchFamily="2" charset="-78"/>
                 <a:cs typeface="Amiri" pitchFamily="2" charset="-78"/>
               </a:rPr>
               <a:t>أُشَارِكُ غُرْفَتِي مَعَ أُخْتِي الصَّغِيرَةِ.</a:t>
@@ -7401,6 +7446,7 @@
                   <a:srgbClr val="1B3B6F"/>
                 </a:solidFill>
                 <a:latin typeface="Amiri" pitchFamily="2" charset="-78"/>
+                <a:ea typeface="Amiri" pitchFamily="2" charset="-78"/>
                 <a:cs typeface="Amiri" pitchFamily="2" charset="-78"/>
               </a:rPr>
               <a:t>أَوَّلًا اشْتَرَيْتُ فُسْتَانًا، ثُمَّ سَافَرْنَا.</a:t>
@@ -7500,6 +7546,7 @@
                   <a:srgbClr val="1B3B6F"/>
                 </a:solidFill>
                 <a:latin typeface="Amiri" pitchFamily="2" charset="-78"/>
+                <a:ea typeface="Amiri" pitchFamily="2" charset="-78"/>
                 <a:cs typeface="Amiri" pitchFamily="2" charset="-78"/>
               </a:rPr>
               <a:t>سَأَدْرُسُ الفَنَّ فِي الجَامِعَةِ.</a:t>
@@ -7661,6 +7708,7 @@
                   <a:srgbClr val="1F2A37"/>
                 </a:solidFill>
                 <a:latin typeface="Amiri" pitchFamily="2" charset="-78"/>
+                <a:ea typeface="Amiri" pitchFamily="2" charset="-78"/>
                 <a:cs typeface="Amiri" pitchFamily="2" charset="-78"/>
               </a:rPr>
               <a:t>أ</a:t>
@@ -7687,6 +7735,7 @@
                   <a:srgbClr val="1F2A37"/>
                 </a:solidFill>
                 <a:latin typeface="Amiri" pitchFamily="2" charset="-78"/>
+                <a:ea typeface="Amiri" pitchFamily="2" charset="-78"/>
                 <a:cs typeface="Amiri" pitchFamily="2" charset="-78"/>
               </a:rPr>
               <a:t>ب</a:t>
@@ -7833,6 +7882,7 @@
                   <a:srgbClr val="D4AF37"/>
                 </a:solidFill>
                 <a:latin typeface="Amiri" pitchFamily="2" charset="-78"/>
+                <a:ea typeface="Amiri" pitchFamily="2" charset="-78"/>
                 <a:cs typeface="Amiri" pitchFamily="2" charset="-78"/>
               </a:rPr>
               <a:t>م</a:t>
@@ -8090,6 +8140,7 @@
                   <a:srgbClr val="8A6D1E"/>
                 </a:solidFill>
                 <a:latin typeface="Amiri" pitchFamily="2" charset="-78"/>
+                <a:ea typeface="Amiri" pitchFamily="2" charset="-78"/>
                 <a:cs typeface="Amiri" pitchFamily="2" charset="-78"/>
               </a:rPr>
               <a:t>أ</a:t>
@@ -8154,6 +8205,7 @@
                   <a:srgbClr val="1B3B6F"/>
                 </a:solidFill>
                 <a:latin typeface="Amiri" pitchFamily="2" charset="-78"/>
+                <a:ea typeface="Amiri" pitchFamily="2" charset="-78"/>
                 <a:cs typeface="Amiri" pitchFamily="2" charset="-78"/>
               </a:rPr>
               <a:t>أ</a:t>
@@ -8205,6 +8257,7 @@
                   <a:srgbClr val="8A6D1E"/>
                 </a:solidFill>
                 <a:latin typeface="Amiri" pitchFamily="2" charset="-78"/>
+                <a:ea typeface="Amiri" pitchFamily="2" charset="-78"/>
                 <a:cs typeface="Amiri" pitchFamily="2" charset="-78"/>
               </a:rPr>
               <a:t>نَمُوذَجُ الإِجَابَةِ</a:t>
@@ -8318,6 +8371,7 @@
                   <a:srgbClr val="1F2A37"/>
                 </a:solidFill>
                 <a:latin typeface="Amiri" pitchFamily="2" charset="-78"/>
+                <a:ea typeface="Amiri" pitchFamily="2" charset="-78"/>
                 <a:cs typeface="Amiri" pitchFamily="2" charset="-78"/>
               </a:rPr>
               <a:t>اسْمِي سَلْمَى، وَعُمْرِي خَمْسَ عَشْرَةَ سَنَةً. أَنَا بِرِيطَانِيَّةٌ، وَأَصْلِي مِنَ السُّودَانِ. أَنَا قَصِيرَةٌ، وَشَعْرِي أَسْوَدُ طَوِيلٌ. أَنَا هَادِئَةٌ وَمُجْتَهِدَةٌ، لٰكِنِّي مَرِحَةٌ مَعَ أَصْدِقَائِي. يَقُولُ أَصْدِقَائِي إِنِّي صَبُورَةٌ وَكَرِيمَةٌ.</a:t>
@@ -8337,6 +8391,7 @@
                   <a:srgbClr val="1F2A37"/>
                 </a:solidFill>
                 <a:latin typeface="Amiri" pitchFamily="2" charset="-78"/>
+                <a:ea typeface="Amiri" pitchFamily="2" charset="-78"/>
                 <a:cs typeface="Amiri" pitchFamily="2" charset="-78"/>
               </a:rPr>
               <a:t>أَسْكُنُ مَعَ أُسْرَتِي فِي شَقَّةٍ فِي الطَّابِقِ الثَّالِثِ. عِنْدِي أَخَوَانِ وَأُخْتٌ صَغِيرَةٌ. أُشَارِكُ غُرْفَتِي مَعَ أُخْتِي، وَغُرْفَتُنَا وَرْدِيَّةٌ، فِيهَا سَرِيرَانِ وَمَكْتَبٌ أَبْيَضُ. أُحِبُّ القِرَاءَةَ وَالرَّسْمَ، وَأَلْعَبُ كُرَةَ السَّلَّةِ مَرَّتَيْنِ فِي الأُسْبُوعِ.</a:t>
@@ -8356,6 +8411,7 @@
                   <a:srgbClr val="1F2A37"/>
                 </a:solidFill>
                 <a:latin typeface="Amiri" pitchFamily="2" charset="-78"/>
+                <a:ea typeface="Amiri" pitchFamily="2" charset="-78"/>
                 <a:cs typeface="Amiri" pitchFamily="2" charset="-78"/>
               </a:rPr>
               <a:t>فِي الصَّيْفِ المَاضِي سَافَرْتُ مَعَ أُسْرَتِي إِلَى الخُرْطُومِ لِحُضُورِ زِفَافِ خَالَتِي. أَوَّلًا اشْتَرَيْتُ فُسْتَانًا أَخْضَرَ جَمِيلًا، ثُمَّ سَافَرْنَا بِالطَّائِرَةِ. فِي الزِّفَافِ رَقَصْنَا وَأَكَلْنَا كَثِيرًا، وَتَعَرَّفْتُ عَلَى أَقَارِبَ جُدُدٍ. كَانَتْ أَجْمَلَ رِحْلَةٍ فِي حَيَاتِي.</a:t>
@@ -8375,6 +8431,7 @@
                   <a:srgbClr val="1F2A37"/>
                 </a:solidFill>
                 <a:latin typeface="Amiri" pitchFamily="2" charset="-78"/>
+                <a:ea typeface="Amiri" pitchFamily="2" charset="-78"/>
                 <a:cs typeface="Amiri" pitchFamily="2" charset="-78"/>
               </a:rPr>
               <a:t>فِي رَأْيِي، الأُسْرَةُ أَهَمُّ شَيْءٍ فِي الحَيَاةِ. فِي المُسْتَقْبَلِ أُرِيدُ أَنْ أَدْرُسَ الفَنَّ، وَسَأَزُورُ السُّودَانَ مَرَّةً أُخْرَى، لِأَنِّي أُحِبُّ جَدَّتِي كَثِيرًا.</a:t>
@@ -8538,11 +8595,12 @@
               <a:buNone/>
             </a:pPr>
             <a:r>
-              <a:rPr lang="en-US" sz="950" b="1" dirty="0">
+              <a:rPr lang="ar-SA" sz="950" b="1" dirty="0">
                 <a:solidFill>
                   <a:srgbClr val="FFFFFF"/>
                 </a:solidFill>
                 <a:latin typeface="Calibri" pitchFamily="34" charset="0"/>
+                <a:ea typeface="Amiri" pitchFamily="2" charset="-78"/>
                 <a:cs typeface="Amiri" pitchFamily="2" charset="-78"/>
               </a:rPr>
               <a:t>أَنَا بِرِيطَانِيَّةٌ</a:t>
@@ -8603,11 +8661,12 @@
               <a:buNone/>
             </a:pPr>
             <a:r>
-              <a:rPr lang="en-US" sz="950" b="1" dirty="0">
+              <a:rPr lang="ar-SA" sz="950" b="1" dirty="0">
                 <a:solidFill>
                   <a:srgbClr val="FFFFFF"/>
                 </a:solidFill>
                 <a:latin typeface="Calibri" pitchFamily="34" charset="0"/>
+                <a:ea typeface="Amiri" pitchFamily="2" charset="-78"/>
                 <a:cs typeface="Amiri" pitchFamily="2" charset="-78"/>
               </a:rPr>
               <a:t>عِنْدِي أَخَوَانِ</a:t>
@@ -8668,11 +8727,12 @@
               <a:buNone/>
             </a:pPr>
             <a:r>
-              <a:rPr lang="en-US" sz="950" b="1" dirty="0">
+              <a:rPr lang="ar-SA" sz="950" b="1" dirty="0">
                 <a:solidFill>
                   <a:srgbClr val="FFFFFF"/>
                 </a:solidFill>
                 <a:latin typeface="Calibri" pitchFamily="34" charset="0"/>
+                <a:ea typeface="Amiri" pitchFamily="2" charset="-78"/>
                 <a:cs typeface="Amiri" pitchFamily="2" charset="-78"/>
               </a:rPr>
               <a:t>أَوَّلًا … ثُمَّ</a:t>
@@ -8733,11 +8793,12 @@
               <a:buNone/>
             </a:pPr>
             <a:r>
-              <a:rPr lang="en-US" sz="950" b="1" dirty="0">
+              <a:rPr lang="ar-SA" sz="950" b="1" dirty="0">
                 <a:solidFill>
                   <a:srgbClr val="FFFFFF"/>
                 </a:solidFill>
                 <a:latin typeface="Calibri" pitchFamily="34" charset="0"/>
+                <a:ea typeface="Amiri" pitchFamily="2" charset="-78"/>
                 <a:cs typeface="Amiri" pitchFamily="2" charset="-78"/>
               </a:rPr>
               <a:t>سَأَزُورُ</a:t>
@@ -8871,6 +8932,7 @@
                   <a:srgbClr val="D4AF37"/>
                 </a:solidFill>
                 <a:latin typeface="Amiri" pitchFamily="2" charset="-78"/>
+                <a:ea typeface="Amiri" pitchFamily="2" charset="-78"/>
                 <a:cs typeface="Amiri" pitchFamily="2" charset="-78"/>
               </a:rPr>
               <a:t>م</a:t>
@@ -9128,6 +9190,7 @@
                   <a:srgbClr val="8A6D1E"/>
                 </a:solidFill>
                 <a:latin typeface="Amiri" pitchFamily="2" charset="-78"/>
+                <a:ea typeface="Amiri" pitchFamily="2" charset="-78"/>
                 <a:cs typeface="Amiri" pitchFamily="2" charset="-78"/>
               </a:rPr>
               <a:t>أ</a:t>
@@ -9192,6 +9255,7 @@
                   <a:srgbClr val="1B3B6F"/>
                 </a:solidFill>
                 <a:latin typeface="Amiri" pitchFamily="2" charset="-78"/>
+                <a:ea typeface="Amiri" pitchFamily="2" charset="-78"/>
                 <a:cs typeface="Amiri" pitchFamily="2" charset="-78"/>
               </a:rPr>
               <a:t>أ</a:t>
@@ -9243,6 +9307,7 @@
                   <a:srgbClr val="8A6D1E"/>
                 </a:solidFill>
                 <a:latin typeface="Amiri" pitchFamily="2" charset="-78"/>
+                <a:ea typeface="Amiri" pitchFamily="2" charset="-78"/>
                 <a:cs typeface="Amiri" pitchFamily="2" charset="-78"/>
               </a:rPr>
               <a:t>نَمُوذَجُ الإِجَابَةِ</a:t>
@@ -9356,6 +9421,7 @@
                   <a:srgbClr val="1F2A37"/>
                 </a:solidFill>
                 <a:latin typeface="Amiri" pitchFamily="2" charset="-78"/>
+                <a:ea typeface="Amiri" pitchFamily="2" charset="-78"/>
                 <a:cs typeface="Amiri" pitchFamily="2" charset="-78"/>
               </a:rPr>
               <a:t>لَوْ طَلَبَ مِنِّي أَحَدٌ أَنْ أَصِفَ نَفْسِي بِثَلَاثِ كَلِمَاتٍ، لَقُلْتُ: بِنْتٌ، وَأُخْتٌ، وَفَنَّانَةٌ. اسْمِي سَلْمَى، وَأَنَا بِرِيطَانِيَّةٌ مِنْ أَصْلٍ سُودَانِيٍّ، أَعِيشُ مَعَ وَالِدَيَّ وَإِخْوَتِي الثَّلَاثَةِ فِي شَقَّةٍ صَغِيرَةٍ لٰكِنَّهَا مَلِيئَةٌ بِالضَّحِكِ وَرَائِحَةِ القَهْوَةِ السُّودَانِيَّةِ.</a:t>
@@ -9375,6 +9441,7 @@
                   <a:srgbClr val="1F2A37"/>
                 </a:solidFill>
                 <a:latin typeface="Amiri" pitchFamily="2" charset="-78"/>
+                <a:ea typeface="Amiri" pitchFamily="2" charset="-78"/>
                 <a:cs typeface="Amiri" pitchFamily="2" charset="-78"/>
               </a:rPr>
               <a:t>أُشَارِكُ غُرْفَتِي مَعَ أُخْتِي الصَّغِيرَةِ، وَقَدْ دَهَنَّاهَا مَعًا بِاللَّوْنِ الوَرْدِيِّ الفَاتِحِ، وَعَلَّقْنَا عَلَى جُدْرَانِهَا لَوْحَاتٍ رَسَمْتُهَا بِنَفْسِي. أَمَّا وَقْتُ فَرَاغِي فَأَقْضِيهِ بَيْنَ الرَّسْمِ وَكُرَةِ السَّلَّةِ، لِأَنَّ الأَوَّلَ يُرِيحُ عَقْلِي، وَالثَّانِيَةَ تُرِيحُ جِسْمِي، وَأَلْعَبُهَا مَعَ فَرِيقِ المَدْرَسَةِ ثَلَاثَ مَرَّاتٍ فِي الأُسْبُوعِ.</a:t>
@@ -9394,6 +9461,7 @@
                   <a:srgbClr val="1F2A37"/>
                 </a:solidFill>
                 <a:latin typeface="Amiri" pitchFamily="2" charset="-78"/>
+                <a:ea typeface="Amiri" pitchFamily="2" charset="-78"/>
                 <a:cs typeface="Amiri" pitchFamily="2" charset="-78"/>
               </a:rPr>
               <a:t>أَجْمَلُ ذِكْرَى عِنْدِي هِيَ زِفَافُ خَالَتِي فِي الخُرْطُومِ فِي الصَّيْفِ المَاضِي. فَقَدْ رَأَيْتُ جَدَّتِي لِأَوَّلِ مَرَّةٍ مُنْذُ خَمْسِ سَنَوَاتٍ، وَعَلَّمَتْنِي أَغَانِيَ قَدِيمَةً، وَرَقَصْنَا حَتَّى الفَجْرِ تَحْتَ النُّجُومِ، وَلَبِسْتُ فُسْتَانًا أَخْضَرَ خَاطَتْهُ لِي بِيَدَيْهَا.</a:t>
@@ -9413,6 +9481,7 @@
                   <a:srgbClr val="1F2A37"/>
                 </a:solidFill>
                 <a:latin typeface="Amiri" pitchFamily="2" charset="-78"/>
+                <a:ea typeface="Amiri" pitchFamily="2" charset="-78"/>
                 <a:cs typeface="Amiri" pitchFamily="2" charset="-78"/>
               </a:rPr>
               <a:t>صَحِيحٌ أَنِّي أَعِيشُ بَيْنَ ثَقَافَتَيْنِ، غَيْرَ أَنِّي لَا أَشْعُرُ بِالحَيْرَةِ، بَلْ بِالغِنَى. وَفِي المُسْتَقْبَلِ سَأَدْرُسُ الفُنُونَ، وَأَحْلُمُ بِأَنْ أُقِيمَ مَعْرِضًا يَجْمَعُ أَلْوَانَ الخُرْطُومِ وَسَمَاءَ لَنْدَنَ.</a:t>
@@ -9511,11 +9580,12 @@
               <a:buNone/>
             </a:pPr>
             <a:r>
-              <a:rPr lang="en-US" sz="950" b="1" dirty="0">
+              <a:rPr lang="ar-SA" sz="950" b="1" dirty="0">
                 <a:solidFill>
                   <a:srgbClr val="FFFFFF"/>
                 </a:solidFill>
                 <a:latin typeface="Calibri" pitchFamily="34" charset="0"/>
+                <a:ea typeface="Amiri" pitchFamily="2" charset="-78"/>
                 <a:cs typeface="Amiri" pitchFamily="2" charset="-78"/>
               </a:rPr>
               <a:t>لَوْ طَلَبَ … لَقُلْتُ</a:t>
@@ -9576,11 +9646,12 @@
               <a:buNone/>
             </a:pPr>
             <a:r>
-              <a:rPr lang="en-US" sz="950" b="1" dirty="0">
+              <a:rPr lang="ar-SA" sz="950" b="1" dirty="0">
                 <a:solidFill>
                   <a:srgbClr val="FFFFFF"/>
                 </a:solidFill>
                 <a:latin typeface="Calibri" pitchFamily="34" charset="0"/>
+                <a:ea typeface="Amiri" pitchFamily="2" charset="-78"/>
                 <a:cs typeface="Amiri" pitchFamily="2" charset="-78"/>
               </a:rPr>
               <a:t>أَمَّا وَقْتُ فَرَاغِي فَأَقْضِيهِ</a:t>
@@ -9641,11 +9712,12 @@
               <a:buNone/>
             </a:pPr>
             <a:r>
-              <a:rPr lang="en-US" sz="950" b="1" dirty="0">
+              <a:rPr lang="ar-SA" sz="950" b="1" dirty="0">
                 <a:solidFill>
                   <a:srgbClr val="FFFFFF"/>
                 </a:solidFill>
                 <a:latin typeface="Calibri" pitchFamily="34" charset="0"/>
+                <a:ea typeface="Amiri" pitchFamily="2" charset="-78"/>
                 <a:cs typeface="Amiri" pitchFamily="2" charset="-78"/>
               </a:rPr>
               <a:t>لِأَوَّلِ مَرَّةٍ مُنْذُ</a:t>
@@ -9706,11 +9778,12 @@
               <a:buNone/>
             </a:pPr>
             <a:r>
-              <a:rPr lang="en-US" sz="950" b="1" dirty="0">
+              <a:rPr lang="ar-SA" sz="950" b="1" dirty="0">
                 <a:solidFill>
                   <a:srgbClr val="FFFFFF"/>
                 </a:solidFill>
                 <a:latin typeface="Calibri" pitchFamily="34" charset="0"/>
+                <a:ea typeface="Amiri" pitchFamily="2" charset="-78"/>
                 <a:cs typeface="Amiri" pitchFamily="2" charset="-78"/>
               </a:rPr>
               <a:t>لَا … بِالحَيْرَةِ، بَلْ</a:t>
@@ -9844,6 +9917,7 @@
                   <a:srgbClr val="D4AF37"/>
                 </a:solidFill>
                 <a:latin typeface="Amiri" pitchFamily="2" charset="-78"/>
+                <a:ea typeface="Amiri" pitchFamily="2" charset="-78"/>
                 <a:cs typeface="Amiri" pitchFamily="2" charset="-78"/>
               </a:rPr>
               <a:t>م</a:t>
@@ -10101,6 +10175,7 @@
                   <a:srgbClr val="8A6D1E"/>
                 </a:solidFill>
                 <a:latin typeface="Amiri" pitchFamily="2" charset="-78"/>
+                <a:ea typeface="Amiri" pitchFamily="2" charset="-78"/>
                 <a:cs typeface="Amiri" pitchFamily="2" charset="-78"/>
               </a:rPr>
               <a:t>ب</a:t>
@@ -10165,6 +10240,7 @@
                   <a:srgbClr val="1B3B6F"/>
                 </a:solidFill>
                 <a:latin typeface="Amiri" pitchFamily="2" charset="-78"/>
+                <a:ea typeface="Amiri" pitchFamily="2" charset="-78"/>
                 <a:cs typeface="Amiri" pitchFamily="2" charset="-78"/>
               </a:rPr>
               <a:t>ب</a:t>
@@ -10216,6 +10292,7 @@
                   <a:srgbClr val="8A6D1E"/>
                 </a:solidFill>
                 <a:latin typeface="Amiri" pitchFamily="2" charset="-78"/>
+                <a:ea typeface="Amiri" pitchFamily="2" charset="-78"/>
                 <a:cs typeface="Amiri" pitchFamily="2" charset="-78"/>
               </a:rPr>
               <a:t>نَمُوذَجُ الإِجَابَةِ</a:t>
@@ -10329,6 +10406,7 @@
                   <a:srgbClr val="1F2A37"/>
                 </a:solidFill>
                 <a:latin typeface="Amiri" pitchFamily="2" charset="-78"/>
+                <a:ea typeface="Amiri" pitchFamily="2" charset="-78"/>
                 <a:cs typeface="Amiri" pitchFamily="2" charset="-78"/>
               </a:rPr>
               <a:t>تَغَيَّرَتِ الحَيَاةُ العَائِلِيَّةُ كَثِيرًا فِي جِيلٍ وَاحِدٍ. فَالعَائِلَةُ الكَبِيرَةُ الَّتِي كَانَتْ تَعِيشُ فِي بَيْتٍ وَاحِدٍ، وَتَأْكُلُ مِنْ صَحْنٍ وَاحِدٍ، أَصْبَحَتْ مُوَزَّعَةً بَيْنَ مُدُنٍ وَبُلْدَانٍ، يَتَوَاصَلُ أَفْرَادُهَا عَبْرَ الهَوَاتِفِ، وَقَدْ لَا يَلْتَقُونَ إِلَّا مَرَّةً فِي السَّنَةِ.</a:t>
@@ -10348,6 +10426,7 @@
                   <a:srgbClr val="1F2A37"/>
                 </a:solidFill>
                 <a:latin typeface="Amiri" pitchFamily="2" charset="-78"/>
+                <a:ea typeface="Amiri" pitchFamily="2" charset="-78"/>
                 <a:cs typeface="Amiri" pitchFamily="2" charset="-78"/>
               </a:rPr>
               <a:t>فِي المَاضِي كَانَ الأَجْدَادُ يُرَبُّونَ الأَحْفَادَ، وَكَانَتِ المُنَاسَبَاتُ تَجْمَعُ الجَمِيعَ أَيَّامًا طَوِيلَةً، أَمَّا اليَوْمَ فَيَعْمَلُ الوَالِدَانِ سَاعَاتٍ طَوِيلَةً، وَيَقْضِي الأَبْنَاءُ وَقْتَهُمْ فِي غُرَفِهِمْ أَمَامَ الشَّاشَاتِ، حَتَّى إِنَّهُمْ يُرْسِلُونَ الرَّسَائِلَ لِبَعْضِهِمْ مِنْ غُرْفَةٍ إِلَى غُرْفَةٍ!</a:t>
@@ -10367,6 +10446,7 @@
                   <a:srgbClr val="1F2A37"/>
                 </a:solidFill>
                 <a:latin typeface="Amiri" pitchFamily="2" charset="-78"/>
+                <a:ea typeface="Amiri" pitchFamily="2" charset="-78"/>
                 <a:cs typeface="Amiri" pitchFamily="2" charset="-78"/>
               </a:rPr>
               <a:t>لَاحَظْتُ ذٰلِكَ فِي أُسْرَتِي؛ فَعِنْدَمَا انْتَقَلَتْ جَدَّتِي لِتَعِيشَ مَعَنَا فِي السَّنَةِ المَاضِيَةِ، تَغَيَّرَ البَيْتُ كُلُّهُ: أَصْبَحْنَا نَتَعَشَّى مَعًا كُلَّ مَسَاءٍ، وَنَسْمَعُ قِصَصَهَا عَنْ طُفُولَتِهَا، وَتَعَلَّمْتُ مِنْهَا الطَّبْخَ وَالصَّبْرَ، وَأَصْبَحَ أَخِي يَتْرُكُ هَاتِفَهُ لِيَلْعَبَ مَعَهَا الشِّطْرَنْجَ.</a:t>
@@ -10386,6 +10466,7 @@
                   <a:srgbClr val="1F2A37"/>
                 </a:solidFill>
                 <a:latin typeface="Amiri" pitchFamily="2" charset="-78"/>
+                <a:ea typeface="Amiri" pitchFamily="2" charset="-78"/>
                 <a:cs typeface="Amiri" pitchFamily="2" charset="-78"/>
               </a:rPr>
               <a:t>صَحِيحٌ أَنَّ الحَيَاةَ الحَدِيثَةَ أَعْطَتِ الشَّبَابَ حُرِّيَّةً وَفُرَصًا أَكْثَرَ، غَيْرَ أَنَّهَا أَخَذَتْ مِنَّا جُزْءًا مِنْ دِفْءِ العَائِلَةِ. وَلَوْ خَصَّصَتْ كُلُّ أُسْرَةٍ وَقْتًا يَوْمِيًّا تَجْتَمِعُ فِيهِ بِلَا شَاشَاتٍ، لَاسْتَعَادَتْ كَثِيرًا مِمَّا فَقَدَتْهُ.</a:t>
@@ -10484,11 +10565,12 @@
               <a:buNone/>
             </a:pPr>
             <a:r>
-              <a:rPr lang="en-US" sz="950" b="1" dirty="0">
+              <a:rPr lang="ar-SA" sz="950" b="1" dirty="0">
                 <a:solidFill>
                   <a:srgbClr val="FFFFFF"/>
                 </a:solidFill>
                 <a:latin typeface="Calibri" pitchFamily="34" charset="0"/>
+                <a:ea typeface="Amiri" pitchFamily="2" charset="-78"/>
                 <a:cs typeface="Amiri" pitchFamily="2" charset="-78"/>
               </a:rPr>
               <a:t>الَّتِي كَانَتْ تَعِيشُ</a:t>
@@ -10549,11 +10631,12 @@
               <a:buNone/>
             </a:pPr>
             <a:r>
-              <a:rPr lang="en-US" sz="950" b="1" dirty="0">
+              <a:rPr lang="ar-SA" sz="950" b="1" dirty="0">
                 <a:solidFill>
                   <a:srgbClr val="FFFFFF"/>
                 </a:solidFill>
                 <a:latin typeface="Calibri" pitchFamily="34" charset="0"/>
+                <a:ea typeface="Amiri" pitchFamily="2" charset="-78"/>
                 <a:cs typeface="Amiri" pitchFamily="2" charset="-78"/>
               </a:rPr>
               <a:t>أَمَّا اليَوْمَ فَيَعْمَلُ</a:t>
@@ -10614,11 +10697,12 @@
               <a:buNone/>
             </a:pPr>
             <a:r>
-              <a:rPr lang="en-US" sz="950" b="1" dirty="0">
+              <a:rPr lang="ar-SA" sz="950" b="1" dirty="0">
                 <a:solidFill>
                   <a:srgbClr val="FFFFFF"/>
                 </a:solidFill>
                 <a:latin typeface="Calibri" pitchFamily="34" charset="0"/>
+                <a:ea typeface="Amiri" pitchFamily="2" charset="-78"/>
                 <a:cs typeface="Amiri" pitchFamily="2" charset="-78"/>
               </a:rPr>
               <a:t>عِنْدَمَا انْتَقَلَتْ … تَغَيَّرَ</a:t>
@@ -10679,11 +10763,12 @@
               <a:buNone/>
             </a:pPr>
             <a:r>
-              <a:rPr lang="en-US" sz="950" b="1" dirty="0">
+              <a:rPr lang="ar-SA" sz="950" b="1" dirty="0">
                 <a:solidFill>
                   <a:srgbClr val="FFFFFF"/>
                 </a:solidFill>
                 <a:latin typeface="Calibri" pitchFamily="34" charset="0"/>
+                <a:ea typeface="Amiri" pitchFamily="2" charset="-78"/>
                 <a:cs typeface="Amiri" pitchFamily="2" charset="-78"/>
               </a:rPr>
               <a:t>لَوْ خَصَّصَتْ … لَاسْتَعَادَتْ</a:t>
@@ -10817,6 +10902,7 @@
                   <a:srgbClr val="D4AF37"/>
                 </a:solidFill>
                 <a:latin typeface="Amiri" pitchFamily="2" charset="-78"/>
+                <a:ea typeface="Amiri" pitchFamily="2" charset="-78"/>
                 <a:cs typeface="Amiri" pitchFamily="2" charset="-78"/>
               </a:rPr>
               <a:t>م</a:t>
@@ -11137,6 +11223,7 @@
                   <a:srgbClr val="8A6D1E"/>
                 </a:solidFill>
                 <a:latin typeface="Amiri" pitchFamily="2" charset="-78"/>
+                <a:ea typeface="Amiri" pitchFamily="2" charset="-78"/>
                 <a:cs typeface="Amiri" pitchFamily="2" charset="-78"/>
               </a:rPr>
               <a:t>قَيِّمْ عَمَلَكَ</a:t>
@@ -12381,6 +12468,7 @@
                   <a:srgbClr val="FFFFFF"/>
                 </a:solidFill>
                 <a:latin typeface="Amiri" pitchFamily="2" charset="-78"/>
+                <a:ea typeface="Amiri" pitchFamily="2" charset="-78"/>
                 <a:cs typeface="Amiri" pitchFamily="2" charset="-78"/>
               </a:rPr>
               <a:t>أَحْسَنْتُمْ! إِلَى اللِّقَاءِ</a:t>
@@ -12533,6 +12621,7 @@
                   <a:srgbClr val="D4AF37"/>
                 </a:solidFill>
                 <a:latin typeface="Amiri" pitchFamily="2" charset="-78"/>
+                <a:ea typeface="Amiri" pitchFamily="2" charset="-78"/>
                 <a:cs typeface="Amiri" pitchFamily="2" charset="-78"/>
               </a:rPr>
               <a:t>المِحْوَرُ التَّالِي</a:t>
@@ -12666,6 +12755,7 @@
                   <a:srgbClr val="D4AF37"/>
                 </a:solidFill>
                 <a:latin typeface="Amiri" pitchFamily="2" charset="-78"/>
+                <a:ea typeface="Amiri" pitchFamily="2" charset="-78"/>
                 <a:cs typeface="Amiri" pitchFamily="2" charset="-78"/>
               </a:rPr>
               <a:t>م</a:t>
@@ -12986,6 +13076,7 @@
                   <a:srgbClr val="8A6D1E"/>
                 </a:solidFill>
                 <a:latin typeface="Amiri" pitchFamily="2" charset="-78"/>
+                <a:ea typeface="Amiri" pitchFamily="2" charset="-78"/>
                 <a:cs typeface="Amiri" pitchFamily="2" charset="-78"/>
               </a:rPr>
               <a:t>آدَابُ الصَّفِّ</a:t>
@@ -14517,6 +14608,7 @@
                   <a:srgbClr val="D4AF37"/>
                 </a:solidFill>
                 <a:latin typeface="Amiri" pitchFamily="2" charset="-78"/>
+                <a:ea typeface="Amiri" pitchFamily="2" charset="-78"/>
                 <a:cs typeface="Amiri" pitchFamily="2" charset="-78"/>
               </a:rPr>
               <a:t>م</a:t>
@@ -14837,6 +14929,7 @@
                   <a:srgbClr val="8A6D1E"/>
                 </a:solidFill>
                 <a:latin typeface="Amiri" pitchFamily="2" charset="-78"/>
+                <a:ea typeface="Amiri" pitchFamily="2" charset="-78"/>
                 <a:cs typeface="Amiri" pitchFamily="2" charset="-78"/>
               </a:rPr>
               <a:t>خَرِيطَةُ الوَرْشَةِ</a:t>
@@ -15151,6 +15244,7 @@
                   <a:srgbClr val="1B3B6F"/>
                 </a:solidFill>
                 <a:latin typeface="Amiri" pitchFamily="2" charset="-78"/>
+                <a:ea typeface="Amiri" pitchFamily="2" charset="-78"/>
                 <a:cs typeface="Amiri" pitchFamily="2" charset="-78"/>
               </a:rPr>
               <a:t>كَيْفَ</a:t>
@@ -15427,6 +15521,7 @@
                   <a:srgbClr val="1E6B52"/>
                 </a:solidFill>
                 <a:latin typeface="Amiri" pitchFamily="2" charset="-78"/>
+                <a:ea typeface="Amiri" pitchFamily="2" charset="-78"/>
                 <a:cs typeface="Amiri" pitchFamily="2" charset="-78"/>
               </a:rPr>
               <a:t>الاسْتِمَارَةُ</a:t>
@@ -15703,6 +15798,7 @@
                   <a:srgbClr val="1E6B52"/>
                 </a:solidFill>
                 <a:latin typeface="Amiri" pitchFamily="2" charset="-78"/>
+                <a:ea typeface="Amiri" pitchFamily="2" charset="-78"/>
                 <a:cs typeface="Amiri" pitchFamily="2" charset="-78"/>
               </a:rPr>
               <a:t>الرِّسَالَةُ</a:t>
@@ -15979,6 +16075,7 @@
                   <a:srgbClr val="1E6B52"/>
                 </a:solidFill>
                 <a:latin typeface="Amiri" pitchFamily="2" charset="-78"/>
+                <a:ea typeface="Amiri" pitchFamily="2" charset="-78"/>
                 <a:cs typeface="Amiri" pitchFamily="2" charset="-78"/>
               </a:rPr>
               <a:t>المَقَالُ</a:t>
@@ -16255,6 +16352,7 @@
                   <a:srgbClr val="8A6D1E"/>
                 </a:solidFill>
                 <a:latin typeface="Amiri" pitchFamily="2" charset="-78"/>
+                <a:ea typeface="Amiri" pitchFamily="2" charset="-78"/>
                 <a:cs typeface="Amiri" pitchFamily="2" charset="-78"/>
               </a:rPr>
               <a:t>قَيِّمْ</a:t>
@@ -16498,6 +16596,7 @@
                   <a:srgbClr val="D4AF37"/>
                 </a:solidFill>
                 <a:latin typeface="Amiri" pitchFamily="2" charset="-78"/>
+                <a:ea typeface="Amiri" pitchFamily="2" charset="-78"/>
                 <a:cs typeface="Amiri" pitchFamily="2" charset="-78"/>
               </a:rPr>
               <a:t>م</a:t>
@@ -16818,6 +16917,7 @@
                   <a:srgbClr val="8A6D1E"/>
                 </a:solidFill>
                 <a:latin typeface="Amiri" pitchFamily="2" charset="-78"/>
+                <a:ea typeface="Amiri" pitchFamily="2" charset="-78"/>
                 <a:cs typeface="Amiri" pitchFamily="2" charset="-78"/>
               </a:rPr>
               <a:t>امْتِحَانُ الكِتَابَةِ</a:t>
@@ -17442,6 +17542,7 @@
                   <a:srgbClr val="1B3B6F"/>
                 </a:solidFill>
                 <a:latin typeface="Amiri" pitchFamily="2" charset="-78"/>
+                <a:ea typeface="Amiri" pitchFamily="2" charset="-78"/>
                 <a:cs typeface="Amiri" pitchFamily="2" charset="-78"/>
               </a:rPr>
               <a:t>يُسْعِدُنِي أَنْ أَدْعُوَكَ إِلَى …</a:t>
@@ -17541,6 +17642,7 @@
                   <a:srgbClr val="1B3B6F"/>
                 </a:solidFill>
                 <a:latin typeface="Amiri" pitchFamily="2" charset="-78"/>
+                <a:ea typeface="Amiri" pitchFamily="2" charset="-78"/>
                 <a:cs typeface="Amiri" pitchFamily="2" charset="-78"/>
               </a:rPr>
               <a:t>بَيْتُنَا الَّذِي يَقَعُ بِجَانِبِ …</a:t>
@@ -17640,6 +17742,7 @@
                   <a:srgbClr val="1B3B6F"/>
                 </a:solidFill>
                 <a:latin typeface="Amiri" pitchFamily="2" charset="-78"/>
+                <a:ea typeface="Amiri" pitchFamily="2" charset="-78"/>
                 <a:cs typeface="Amiri" pitchFamily="2" charset="-78"/>
               </a:rPr>
               <a:t>أَرْجُو أَلَّا تُحْضِرَ هَدِيَّةً</a:t>
@@ -17811,6 +17914,7 @@
                   <a:srgbClr val="D4AF37"/>
                 </a:solidFill>
                 <a:latin typeface="Amiri" pitchFamily="2" charset="-78"/>
+                <a:ea typeface="Amiri" pitchFamily="2" charset="-78"/>
                 <a:cs typeface="Amiri" pitchFamily="2" charset="-78"/>
               </a:rPr>
               <a:t>م</a:t>
@@ -18131,6 +18235,7 @@
                   <a:srgbClr val="8A6D1E"/>
                 </a:solidFill>
                 <a:latin typeface="Amiri" pitchFamily="2" charset="-78"/>
+                <a:ea typeface="Amiri" pitchFamily="2" charset="-78"/>
                 <a:cs typeface="Amiri" pitchFamily="2" charset="-78"/>
               </a:rPr>
               <a:t>مَلَفُّ نَادِي المُرَاسَلَةِ</a:t>
@@ -18487,6 +18592,7 @@
                   <a:srgbClr val="1B3B6F"/>
                 </a:solidFill>
                 <a:latin typeface="Amiri" pitchFamily="2" charset="-78"/>
+                <a:ea typeface="Amiri" pitchFamily="2" charset="-78"/>
                 <a:cs typeface="Amiri" pitchFamily="2" charset="-78"/>
               </a:rPr>
               <a:t>الاسْمُ وَالعُمْرُ وَالجِنْسِيَّةُ</a:t>
@@ -18731,6 +18837,7 @@
                   <a:srgbClr val="1B3B6F"/>
                 </a:solidFill>
                 <a:latin typeface="Amiri" pitchFamily="2" charset="-78"/>
+                <a:ea typeface="Amiri" pitchFamily="2" charset="-78"/>
                 <a:cs typeface="Amiri" pitchFamily="2" charset="-78"/>
               </a:rPr>
               <a:t>أَفْرَادُ الأُسْرَةِ</a:t>
@@ -18975,6 +19082,7 @@
                   <a:srgbClr val="1B3B6F"/>
                 </a:solidFill>
                 <a:latin typeface="Amiri" pitchFamily="2" charset="-78"/>
+                <a:ea typeface="Amiri" pitchFamily="2" charset="-78"/>
                 <a:cs typeface="Amiri" pitchFamily="2" charset="-78"/>
               </a:rPr>
               <a:t>صِفَتَانِ لِشَكْلِكَ</a:t>
@@ -19219,6 +19327,7 @@
                   <a:srgbClr val="1B3B6F"/>
                 </a:solidFill>
                 <a:latin typeface="Amiri" pitchFamily="2" charset="-78"/>
+                <a:ea typeface="Amiri" pitchFamily="2" charset="-78"/>
                 <a:cs typeface="Amiri" pitchFamily="2" charset="-78"/>
               </a:rPr>
               <a:t>صِفَتَانِ لِشَخْصِيَّتِكَ</a:t>
@@ -19463,6 +19572,7 @@
                   <a:srgbClr val="1B3B6F"/>
                 </a:solidFill>
                 <a:latin typeface="Amiri" pitchFamily="2" charset="-78"/>
+                <a:ea typeface="Amiri" pitchFamily="2" charset="-78"/>
                 <a:cs typeface="Amiri" pitchFamily="2" charset="-78"/>
               </a:rPr>
               <a:t>لَوْنُكَ المُفَضَّلُ</a:t>
@@ -19707,6 +19817,7 @@
                   <a:srgbClr val="1B3B6F"/>
                 </a:solidFill>
                 <a:latin typeface="Amiri" pitchFamily="2" charset="-78"/>
+                <a:ea typeface="Amiri" pitchFamily="2" charset="-78"/>
                 <a:cs typeface="Amiri" pitchFamily="2" charset="-78"/>
               </a:rPr>
               <a:t>هِوَايَتَانِ</a:t>
@@ -19951,6 +20062,7 @@
                   <a:srgbClr val="1B3B6F"/>
                 </a:solidFill>
                 <a:latin typeface="Amiri" pitchFamily="2" charset="-78"/>
+                <a:ea typeface="Amiri" pitchFamily="2" charset="-78"/>
                 <a:cs typeface="Amiri" pitchFamily="2" charset="-78"/>
               </a:rPr>
               <a:t>وَصْفُ غُرْفَتِكَ</a:t>
@@ -20130,6 +20242,7 @@
                   <a:srgbClr val="1B3B6F"/>
                 </a:solidFill>
                 <a:latin typeface="Amiri" pitchFamily="2" charset="-78"/>
+                <a:ea typeface="Amiri" pitchFamily="2" charset="-78"/>
                 <a:cs typeface="Amiri" pitchFamily="2" charset="-78"/>
               </a:rPr>
               <a:t>جُمْلَةٌ: أَجْمَلُ مُنَاسَبَةٍ حَضَرْتَهَا</a:t>
@@ -20339,6 +20452,7 @@
                   <a:srgbClr val="D4AF37"/>
                 </a:solidFill>
                 <a:latin typeface="Amiri" pitchFamily="2" charset="-78"/>
+                <a:ea typeface="Amiri" pitchFamily="2" charset="-78"/>
                 <a:cs typeface="Amiri" pitchFamily="2" charset="-78"/>
               </a:rPr>
               <a:t>م</a:t>
@@ -20659,6 +20773,7 @@
                   <a:srgbClr val="8A6D1E"/>
                 </a:solidFill>
                 <a:latin typeface="Amiri" pitchFamily="2" charset="-78"/>
+                <a:ea typeface="Amiri" pitchFamily="2" charset="-78"/>
                 <a:cs typeface="Amiri" pitchFamily="2" charset="-78"/>
               </a:rPr>
               <a:t>نَمُوذَجُ الإِجَابَةِ</a:t>
@@ -20977,6 +21092,7 @@
                   <a:srgbClr val="1B3B6F"/>
                 </a:solidFill>
                 <a:latin typeface="Amiri" pitchFamily="2" charset="-78"/>
+                <a:ea typeface="Amiri" pitchFamily="2" charset="-78"/>
                 <a:cs typeface="Amiri" pitchFamily="2" charset="-78"/>
               </a:rPr>
               <a:t>سَلْمَى، خَمْسَ عَشْرَةَ سَنَةً، بِرِيطَانِيَّةٌ</a:t>
@@ -21015,6 +21131,7 @@
                   <a:srgbClr val="1B3B6F"/>
                 </a:solidFill>
                 <a:latin typeface="Amiri" pitchFamily="2" charset="-78"/>
+                <a:ea typeface="Amiri" pitchFamily="2" charset="-78"/>
                 <a:cs typeface="Amiri" pitchFamily="2" charset="-78"/>
               </a:rPr>
               <a:t>الاسْمُ وَالعُمْرُ وَالجِنْسِيَّةُ</a:t>
@@ -21156,6 +21273,7 @@
                   <a:srgbClr val="1B3B6F"/>
                 </a:solidFill>
                 <a:latin typeface="Amiri" pitchFamily="2" charset="-78"/>
+                <a:ea typeface="Amiri" pitchFamily="2" charset="-78"/>
                 <a:cs typeface="Amiri" pitchFamily="2" charset="-78"/>
               </a:rPr>
               <a:t>وَالِدَايَ وَأَخَوَانِ وَأُخْتٌ</a:t>
@@ -21194,6 +21312,7 @@
                   <a:srgbClr val="1B3B6F"/>
                 </a:solidFill>
                 <a:latin typeface="Amiri" pitchFamily="2" charset="-78"/>
+                <a:ea typeface="Amiri" pitchFamily="2" charset="-78"/>
                 <a:cs typeface="Amiri" pitchFamily="2" charset="-78"/>
               </a:rPr>
               <a:t>أَفْرَادُ الأُسْرَةِ</a:t>
@@ -21335,6 +21454,7 @@
                   <a:srgbClr val="1B3B6F"/>
                 </a:solidFill>
                 <a:latin typeface="Amiri" pitchFamily="2" charset="-78"/>
+                <a:ea typeface="Amiri" pitchFamily="2" charset="-78"/>
                 <a:cs typeface="Amiri" pitchFamily="2" charset="-78"/>
               </a:rPr>
               <a:t>قَصِيرَةٌ، شَعْرِي أَسْوَدُ</a:t>
@@ -21373,6 +21493,7 @@
                   <a:srgbClr val="1B3B6F"/>
                 </a:solidFill>
                 <a:latin typeface="Amiri" pitchFamily="2" charset="-78"/>
+                <a:ea typeface="Amiri" pitchFamily="2" charset="-78"/>
                 <a:cs typeface="Amiri" pitchFamily="2" charset="-78"/>
               </a:rPr>
               <a:t>صِفَتَانِ لِشَكْلِكَ</a:t>
@@ -21514,6 +21635,7 @@
                   <a:srgbClr val="1B3B6F"/>
                 </a:solidFill>
                 <a:latin typeface="Amiri" pitchFamily="2" charset="-78"/>
+                <a:ea typeface="Amiri" pitchFamily="2" charset="-78"/>
                 <a:cs typeface="Amiri" pitchFamily="2" charset="-78"/>
               </a:rPr>
               <a:t>هَادِئَةٌ وَمَرِحَةٌ</a:t>
@@ -21552,6 +21674,7 @@
                   <a:srgbClr val="1B3B6F"/>
                 </a:solidFill>
                 <a:latin typeface="Amiri" pitchFamily="2" charset="-78"/>
+                <a:ea typeface="Amiri" pitchFamily="2" charset="-78"/>
                 <a:cs typeface="Amiri" pitchFamily="2" charset="-78"/>
               </a:rPr>
               <a:t>صِفَتَانِ لِشَخْصِيَّتِكَ</a:t>
@@ -21693,6 +21816,7 @@
                   <a:srgbClr val="1B3B6F"/>
                 </a:solidFill>
                 <a:latin typeface="Amiri" pitchFamily="2" charset="-78"/>
+                <a:ea typeface="Amiri" pitchFamily="2" charset="-78"/>
                 <a:cs typeface="Amiri" pitchFamily="2" charset="-78"/>
               </a:rPr>
               <a:t>الأَخْضَرُ</a:t>
@@ -21731,6 +21855,7 @@
                   <a:srgbClr val="1B3B6F"/>
                 </a:solidFill>
                 <a:latin typeface="Amiri" pitchFamily="2" charset="-78"/>
+                <a:ea typeface="Amiri" pitchFamily="2" charset="-78"/>
                 <a:cs typeface="Amiri" pitchFamily="2" charset="-78"/>
               </a:rPr>
               <a:t>لَوْنُكَ المُفَضَّلُ</a:t>
@@ -21872,6 +21997,7 @@
                   <a:srgbClr val="1B3B6F"/>
                 </a:solidFill>
                 <a:latin typeface="Amiri" pitchFamily="2" charset="-78"/>
+                <a:ea typeface="Amiri" pitchFamily="2" charset="-78"/>
                 <a:cs typeface="Amiri" pitchFamily="2" charset="-78"/>
               </a:rPr>
               <a:t>الرَّسْمُ وَكُرَةُ السَّلَّةِ</a:t>
@@ -21910,6 +22036,7 @@
                   <a:srgbClr val="1B3B6F"/>
                 </a:solidFill>
                 <a:latin typeface="Amiri" pitchFamily="2" charset="-78"/>
+                <a:ea typeface="Amiri" pitchFamily="2" charset="-78"/>
                 <a:cs typeface="Amiri" pitchFamily="2" charset="-78"/>
               </a:rPr>
               <a:t>هِوَايَتَانِ</a:t>
@@ -22051,6 +22178,7 @@
                   <a:srgbClr val="1B3B6F"/>
                 </a:solidFill>
                 <a:latin typeface="Amiri" pitchFamily="2" charset="-78"/>
+                <a:ea typeface="Amiri" pitchFamily="2" charset="-78"/>
                 <a:cs typeface="Amiri" pitchFamily="2" charset="-78"/>
               </a:rPr>
               <a:t>وَرْدِيَّةٌ، فِيهَا سَرِيرَانِ</a:t>
@@ -22089,6 +22217,7 @@
                   <a:srgbClr val="1B3B6F"/>
                 </a:solidFill>
                 <a:latin typeface="Amiri" pitchFamily="2" charset="-78"/>
+                <a:ea typeface="Amiri" pitchFamily="2" charset="-78"/>
                 <a:cs typeface="Amiri" pitchFamily="2" charset="-78"/>
               </a:rPr>
               <a:t>وَصْفُ غُرْفَتِكَ</a:t>
@@ -22230,6 +22359,7 @@
                   <a:srgbClr val="1B3B6F"/>
                 </a:solidFill>
                 <a:latin typeface="Amiri" pitchFamily="2" charset="-78"/>
+                <a:ea typeface="Amiri" pitchFamily="2" charset="-78"/>
                 <a:cs typeface="Amiri" pitchFamily="2" charset="-78"/>
               </a:rPr>
               <a:t>أَجْمَلُ مُنَاسَبَةٍ كَانَتْ زِفَافَ خَالَتِي فِي الخُرْطُومِ فِي الصَّيْفِ المَاضِي.</a:t>
@@ -22268,6 +22398,7 @@
                   <a:srgbClr val="1B3B6F"/>
                 </a:solidFill>
                 <a:latin typeface="Amiri" pitchFamily="2" charset="-78"/>
+                <a:ea typeface="Amiri" pitchFamily="2" charset="-78"/>
                 <a:cs typeface="Amiri" pitchFamily="2" charset="-78"/>
               </a:rPr>
               <a:t>جُمْلَةٌ: أَجْمَلُ مُنَاسَبَةٍ حَضَرْتَهَا</a:t>
@@ -22477,6 +22608,7 @@
                   <a:srgbClr val="D4AF37"/>
                 </a:solidFill>
                 <a:latin typeface="Amiri" pitchFamily="2" charset="-78"/>
+                <a:ea typeface="Amiri" pitchFamily="2" charset="-78"/>
                 <a:cs typeface="Amiri" pitchFamily="2" charset="-78"/>
               </a:rPr>
               <a:t>م</a:t>
@@ -22797,6 +22929,7 @@
                   <a:srgbClr val="8A6D1E"/>
                 </a:solidFill>
                 <a:latin typeface="Amiri" pitchFamily="2" charset="-78"/>
+                <a:ea typeface="Amiri" pitchFamily="2" charset="-78"/>
                 <a:cs typeface="Amiri" pitchFamily="2" charset="-78"/>
               </a:rPr>
               <a:t>رِسَالَةُ دَعْوَةٍ</a:t>
@@ -23272,6 +23405,7 @@
                   <a:srgbClr val="1B3B6F"/>
                 </a:solidFill>
                 <a:latin typeface="Amiri" pitchFamily="2" charset="-78"/>
+                <a:ea typeface="Amiri" pitchFamily="2" charset="-78"/>
                 <a:cs typeface="Amiri" pitchFamily="2" charset="-78"/>
               </a:rPr>
               <a:t>أَدْعُوكَ إِلَى … يَوْمَ … فِي السَّاعَةِ …</a:t>
@@ -23348,6 +23482,7 @@
                   <a:srgbClr val="1B3B6F"/>
                 </a:solidFill>
                 <a:latin typeface="Amiri" pitchFamily="2" charset="-78"/>
+                <a:ea typeface="Amiri" pitchFamily="2" charset="-78"/>
                 <a:cs typeface="Amiri" pitchFamily="2" charset="-78"/>
               </a:rPr>
               <a:t>بَيْتُنَا بِجَانِبِ …</a:t>
@@ -23424,6 +23559,7 @@
                   <a:srgbClr val="1B3B6F"/>
                 </a:solidFill>
                 <a:latin typeface="Amiri" pitchFamily="2" charset="-78"/>
+                <a:ea typeface="Amiri" pitchFamily="2" charset="-78"/>
                 <a:cs typeface="Amiri" pitchFamily="2" charset="-78"/>
               </a:rPr>
               <a:t>أَمْسِ اشْتَرَيْتُ …</a:t>
@@ -23500,6 +23636,7 @@
                   <a:srgbClr val="1B3B6F"/>
                 </a:solidFill>
                 <a:latin typeface="Amiri" pitchFamily="2" charset="-78"/>
+                <a:ea typeface="Amiri" pitchFamily="2" charset="-78"/>
                 <a:cs typeface="Amiri" pitchFamily="2" charset="-78"/>
               </a:rPr>
               <a:t>إِذَا لَمْ تَسْتَطِعْ، فَأَخْبِرْنِي</a:t>
@@ -23671,6 +23808,7 @@
                   <a:srgbClr val="D4AF37"/>
                 </a:solidFill>
                 <a:latin typeface="Amiri" pitchFamily="2" charset="-78"/>
+                <a:ea typeface="Amiri" pitchFamily="2" charset="-78"/>
                 <a:cs typeface="Amiri" pitchFamily="2" charset="-78"/>
               </a:rPr>
               <a:t>م</a:t>
@@ -23991,6 +24129,7 @@
                   <a:srgbClr val="8A6D1E"/>
                 </a:solidFill>
                 <a:latin typeface="Amiri" pitchFamily="2" charset="-78"/>
+                <a:ea typeface="Amiri" pitchFamily="2" charset="-78"/>
                 <a:cs typeface="Amiri" pitchFamily="2" charset="-78"/>
               </a:rPr>
               <a:t>نَصُّ السُّؤَالِ</a:t>
@@ -24271,6 +24410,7 @@
                   <a:srgbClr val="1B3B6F"/>
                 </a:solidFill>
                 <a:latin typeface="Amiri" pitchFamily="2" charset="-78"/>
+                <a:ea typeface="Amiri" pitchFamily="2" charset="-78"/>
                 <a:cs typeface="Amiri" pitchFamily="2" charset="-78"/>
               </a:rPr>
               <a:t>عِنْدَكَ حَفْلَةُ عِيدِ مِيلَادٍ. اكْتُبْ رِسَالَةً إِلَى صَدِيقِكَ (٨٠–٩٠ كَلِمَةً).</a:t>
@@ -24412,6 +24552,7 @@
                   <a:srgbClr val="1B3B6F"/>
                 </a:solidFill>
                 <a:latin typeface="Amiri" pitchFamily="2" charset="-78"/>
+                <a:ea typeface="Amiri" pitchFamily="2" charset="-78"/>
                 <a:cs typeface="Amiri" pitchFamily="2" charset="-78"/>
               </a:rPr>
               <a:t>مَتَى وَأَيْنَ الحَفْلَةُ؟ صِفْ بَيْتَكَ.</a:t>
@@ -24553,6 +24694,7 @@
                   <a:srgbClr val="1B3B6F"/>
                 </a:solidFill>
                 <a:latin typeface="Amiri" pitchFamily="2" charset="-78"/>
+                <a:ea typeface="Amiri" pitchFamily="2" charset="-78"/>
                 <a:cs typeface="Amiri" pitchFamily="2" charset="-78"/>
               </a:rPr>
               <a:t>مَنْ سَيَحْضُرُ؟ وَمَاذَا سَتَفْعَلُونَ؟</a:t>
@@ -24694,6 +24836,7 @@
                   <a:srgbClr val="1B3B6F"/>
                 </a:solidFill>
                 <a:latin typeface="Amiri" pitchFamily="2" charset="-78"/>
+                <a:ea typeface="Amiri" pitchFamily="2" charset="-78"/>
                 <a:cs typeface="Amiri" pitchFamily="2" charset="-78"/>
               </a:rPr>
               <a:t>مَاذَا فَعَلْتَ أَمْسِ لِتَسْتَعِدَّ؟</a:t>
@@ -24835,6 +24978,7 @@
                   <a:srgbClr val="1B3B6F"/>
                 </a:solidFill>
                 <a:latin typeface="Amiri" pitchFamily="2" charset="-78"/>
+                <a:ea typeface="Amiri" pitchFamily="2" charset="-78"/>
                 <a:cs typeface="Amiri" pitchFamily="2" charset="-78"/>
               </a:rPr>
               <a:t>اطْلُبْ مِنْهُ طَلَبًا. وَمَاذَا يَفْعَلُ إِذَا لَمْ يَسْتَطِعِ الحُضُورَ؟</a:t>
@@ -25044,6 +25188,7 @@
                   <a:srgbClr val="D4AF37"/>
                 </a:solidFill>
                 <a:latin typeface="Amiri" pitchFamily="2" charset="-78"/>
+                <a:ea typeface="Amiri" pitchFamily="2" charset="-78"/>
                 <a:cs typeface="Amiri" pitchFamily="2" charset="-78"/>
               </a:rPr>
               <a:t>م</a:t>
@@ -25364,6 +25509,7 @@
                   <a:srgbClr val="8A6D1E"/>
                 </a:solidFill>
                 <a:latin typeface="Amiri" pitchFamily="2" charset="-78"/>
+                <a:ea typeface="Amiri" pitchFamily="2" charset="-78"/>
                 <a:cs typeface="Amiri" pitchFamily="2" charset="-78"/>
               </a:rPr>
               <a:t>قَوَالِبُ الكِتَابَةِ</a:t>
@@ -25644,6 +25790,7 @@
                   <a:srgbClr val="1B3B6F"/>
                 </a:solidFill>
                 <a:latin typeface="Amiri" pitchFamily="2" charset="-78"/>
+                <a:ea typeface="Amiri" pitchFamily="2" charset="-78"/>
                 <a:cs typeface="Amiri" pitchFamily="2" charset="-78"/>
               </a:rPr>
               <a:t>عَزِيزِي ______ ، كَيْفَ حَالُكَ؟</a:t>
@@ -25850,6 +25997,7 @@
                   <a:srgbClr val="1B3B6F"/>
                 </a:solidFill>
                 <a:latin typeface="Amiri" pitchFamily="2" charset="-78"/>
+                <a:ea typeface="Amiri" pitchFamily="2" charset="-78"/>
                 <a:cs typeface="Amiri" pitchFamily="2" charset="-78"/>
               </a:rPr>
               <a:t>أَدْعُوكَ إِلَى حَفْلَتِي يَوْمَ ______ فِي السَّاعَةِ ______ . بَيْتُنَا بِجَانِبِ ______ .</a:t>
@@ -26056,6 +26204,7 @@
                   <a:srgbClr val="1B3B6F"/>
                 </a:solidFill>
                 <a:latin typeface="Amiri" pitchFamily="2" charset="-78"/>
+                <a:ea typeface="Amiri" pitchFamily="2" charset="-78"/>
                 <a:cs typeface="Amiri" pitchFamily="2" charset="-78"/>
               </a:rPr>
               <a:t>سَيَأْتِي ______ . سَنَأْكُلُ ______ ، ثُمَّ ______ .</a:t>
@@ -26262,6 +26411,7 @@
                   <a:srgbClr val="1B3B6F"/>
                 </a:solidFill>
                 <a:latin typeface="Amiri" pitchFamily="2" charset="-78"/>
+                <a:ea typeface="Amiri" pitchFamily="2" charset="-78"/>
                 <a:cs typeface="Amiri" pitchFamily="2" charset="-78"/>
               </a:rPr>
               <a:t>أَمْسِ اشْتَرَيْتُ ______ ______ لِلْحَفْلَةِ.</a:t>
@@ -26468,6 +26618,7 @@
                   <a:srgbClr val="1B3B6F"/>
                 </a:solidFill>
                 <a:latin typeface="Amiri" pitchFamily="2" charset="-78"/>
+                <a:ea typeface="Amiri" pitchFamily="2" charset="-78"/>
                 <a:cs typeface="Amiri" pitchFamily="2" charset="-78"/>
               </a:rPr>
               <a:t>لَا تُحْضِرْ ______ . إِذَا لَمْ تَسْتَطِعْ، فَاتَّصِلْ بِي.</a:t>
@@ -26674,6 +26825,7 @@
                   <a:srgbClr val="1B3B6F"/>
                 </a:solidFill>
                 <a:latin typeface="Amiri" pitchFamily="2" charset="-78"/>
+                <a:ea typeface="Amiri" pitchFamily="2" charset="-78"/>
                 <a:cs typeface="Amiri" pitchFamily="2" charset="-78"/>
               </a:rPr>
               <a:t>مَعَ السَّلَامَةِ، ______</a:t>
@@ -26913,13 +27065,9 @@
     <a:fontScheme name="Office">
       <a:majorFont>
         <a:latin typeface="Calibri Light" panose="020F0302020204030204"/>
-        <a:ea typeface=""/>
-        <a:cs typeface=""/>
-        <a:font script="Jpan" typeface="游ゴシック Light"/>
-        <a:font script="Hang" typeface="맑은 고딕"/>
-        <a:font script="Hans" typeface="等线 Light"/>
-        <a:font script="Hant" typeface="新細明體"/>
-        <a:font script="Arab" typeface="Times New Roman"/>
+        <a:ea typeface="Amiri" pitchFamily="2" charset="-78"/>
+        <a:cs typeface="Amiri" pitchFamily="2" charset="-78"/>
+        <a:font script="Arab" typeface="Amiri"/>
         <a:font script="Hebr" typeface="Times New Roman"/>
         <a:font script="Thai" typeface="Angsana New"/>
         <a:font script="Ethi" typeface="Nyala"/>
@@ -26965,13 +27113,9 @@
       </a:majorFont>
       <a:minorFont>
         <a:latin typeface="Calibri" panose="020F0502020204030204"/>
-        <a:ea typeface=""/>
-        <a:cs typeface=""/>
-        <a:font script="Jpan" typeface="游ゴシック"/>
-        <a:font script="Hang" typeface="맑은 고딕"/>
-        <a:font script="Hans" typeface="等线"/>
-        <a:font script="Hant" typeface="新細明體"/>
-        <a:font script="Arab" typeface="Arial"/>
+        <a:ea typeface="Amiri" pitchFamily="2" charset="-78"/>
+        <a:cs typeface="Amiri" pitchFamily="2" charset="-78"/>
+        <a:font script="Arab" typeface="Amiri"/>
         <a:font script="Hebr" typeface="Arial"/>
         <a:font script="Thai" typeface="Cordia New"/>
         <a:font script="Ethi" typeface="Nyala"/>

--- a/Topic_B/Exam_Practice/TB-L12_Writing_Workshop_Topic_B_Review_and_Four_Skills_Assessment.pptx
+++ b/Topic_B/Exam_Practice/TB-L12_Writing_Workshop_Topic_B_Review_and_Four_Skills_Assessment.pptx
@@ -3848,7 +3848,7 @@
                 <a:solidFill>
                   <a:srgbClr val="FFFFFF"/>
                 </a:solidFill>
-                <a:latin typeface="Calibri" pitchFamily="34" charset="0"/>
+                <a:latin typeface="Amiri" pitchFamily="2" charset="-78"/>
                 <a:ea typeface="Amiri" pitchFamily="2" charset="-78"/>
                 <a:cs typeface="Amiri" pitchFamily="2" charset="-78"/>
               </a:rPr>
@@ -3914,7 +3914,7 @@
                 <a:solidFill>
                   <a:srgbClr val="FFFFFF"/>
                 </a:solidFill>
-                <a:latin typeface="Calibri" pitchFamily="34" charset="0"/>
+                <a:latin typeface="Amiri" pitchFamily="2" charset="-78"/>
                 <a:ea typeface="Amiri" pitchFamily="2" charset="-78"/>
                 <a:cs typeface="Amiri" pitchFamily="2" charset="-78"/>
               </a:rPr>
@@ -3980,7 +3980,7 @@
                 <a:solidFill>
                   <a:srgbClr val="FFFFFF"/>
                 </a:solidFill>
-                <a:latin typeface="Calibri" pitchFamily="34" charset="0"/>
+                <a:latin typeface="Amiri" pitchFamily="2" charset="-78"/>
                 <a:ea typeface="Amiri" pitchFamily="2" charset="-78"/>
                 <a:cs typeface="Amiri" pitchFamily="2" charset="-78"/>
               </a:rPr>
@@ -4046,7 +4046,7 @@
                 <a:solidFill>
                   <a:srgbClr val="FFFFFF"/>
                 </a:solidFill>
-                <a:latin typeface="Calibri" pitchFamily="34" charset="0"/>
+                <a:latin typeface="Amiri" pitchFamily="2" charset="-78"/>
                 <a:ea typeface="Amiri" pitchFamily="2" charset="-78"/>
                 <a:cs typeface="Amiri" pitchFamily="2" charset="-78"/>
               </a:rPr>
@@ -4844,7 +4844,7 @@
                 <a:solidFill>
                   <a:srgbClr val="FFFFFF"/>
                 </a:solidFill>
-                <a:latin typeface="Calibri" pitchFamily="34" charset="0"/>
+                <a:latin typeface="Amiri" pitchFamily="2" charset="-78"/>
                 <a:ea typeface="Amiri" pitchFamily="2" charset="-78"/>
                 <a:cs typeface="Amiri" pitchFamily="2" charset="-78"/>
               </a:rPr>
@@ -4910,7 +4910,7 @@
                 <a:solidFill>
                   <a:srgbClr val="FFFFFF"/>
                 </a:solidFill>
-                <a:latin typeface="Calibri" pitchFamily="34" charset="0"/>
+                <a:latin typeface="Amiri" pitchFamily="2" charset="-78"/>
                 <a:ea typeface="Amiri" pitchFamily="2" charset="-78"/>
                 <a:cs typeface="Amiri" pitchFamily="2" charset="-78"/>
               </a:rPr>
@@ -4976,7 +4976,7 @@
                 <a:solidFill>
                   <a:srgbClr val="FFFFFF"/>
                 </a:solidFill>
-                <a:latin typeface="Calibri" pitchFamily="34" charset="0"/>
+                <a:latin typeface="Amiri" pitchFamily="2" charset="-78"/>
                 <a:ea typeface="Amiri" pitchFamily="2" charset="-78"/>
                 <a:cs typeface="Amiri" pitchFamily="2" charset="-78"/>
               </a:rPr>
@@ -5042,7 +5042,7 @@
                 <a:solidFill>
                   <a:srgbClr val="FFFFFF"/>
                 </a:solidFill>
-                <a:latin typeface="Calibri" pitchFamily="34" charset="0"/>
+                <a:latin typeface="Amiri" pitchFamily="2" charset="-78"/>
                 <a:ea typeface="Amiri" pitchFamily="2" charset="-78"/>
                 <a:cs typeface="Amiri" pitchFamily="2" charset="-78"/>
               </a:rPr>
@@ -8599,7 +8599,7 @@
                 <a:solidFill>
                   <a:srgbClr val="FFFFFF"/>
                 </a:solidFill>
-                <a:latin typeface="Calibri" pitchFamily="34" charset="0"/>
+                <a:latin typeface="Amiri" pitchFamily="2" charset="-78"/>
                 <a:ea typeface="Amiri" pitchFamily="2" charset="-78"/>
                 <a:cs typeface="Amiri" pitchFamily="2" charset="-78"/>
               </a:rPr>
@@ -8665,7 +8665,7 @@
                 <a:solidFill>
                   <a:srgbClr val="FFFFFF"/>
                 </a:solidFill>
-                <a:latin typeface="Calibri" pitchFamily="34" charset="0"/>
+                <a:latin typeface="Amiri" pitchFamily="2" charset="-78"/>
                 <a:ea typeface="Amiri" pitchFamily="2" charset="-78"/>
                 <a:cs typeface="Amiri" pitchFamily="2" charset="-78"/>
               </a:rPr>
@@ -8731,7 +8731,7 @@
                 <a:solidFill>
                   <a:srgbClr val="FFFFFF"/>
                 </a:solidFill>
-                <a:latin typeface="Calibri" pitchFamily="34" charset="0"/>
+                <a:latin typeface="Amiri" pitchFamily="2" charset="-78"/>
                 <a:ea typeface="Amiri" pitchFamily="2" charset="-78"/>
                 <a:cs typeface="Amiri" pitchFamily="2" charset="-78"/>
               </a:rPr>
@@ -8797,7 +8797,7 @@
                 <a:solidFill>
                   <a:srgbClr val="FFFFFF"/>
                 </a:solidFill>
-                <a:latin typeface="Calibri" pitchFamily="34" charset="0"/>
+                <a:latin typeface="Amiri" pitchFamily="2" charset="-78"/>
                 <a:ea typeface="Amiri" pitchFamily="2" charset="-78"/>
                 <a:cs typeface="Amiri" pitchFamily="2" charset="-78"/>
               </a:rPr>
@@ -9584,7 +9584,7 @@
                 <a:solidFill>
                   <a:srgbClr val="FFFFFF"/>
                 </a:solidFill>
-                <a:latin typeface="Calibri" pitchFamily="34" charset="0"/>
+                <a:latin typeface="Amiri" pitchFamily="2" charset="-78"/>
                 <a:ea typeface="Amiri" pitchFamily="2" charset="-78"/>
                 <a:cs typeface="Amiri" pitchFamily="2" charset="-78"/>
               </a:rPr>
@@ -9650,7 +9650,7 @@
                 <a:solidFill>
                   <a:srgbClr val="FFFFFF"/>
                 </a:solidFill>
-                <a:latin typeface="Calibri" pitchFamily="34" charset="0"/>
+                <a:latin typeface="Amiri" pitchFamily="2" charset="-78"/>
                 <a:ea typeface="Amiri" pitchFamily="2" charset="-78"/>
                 <a:cs typeface="Amiri" pitchFamily="2" charset="-78"/>
               </a:rPr>
@@ -9716,7 +9716,7 @@
                 <a:solidFill>
                   <a:srgbClr val="FFFFFF"/>
                 </a:solidFill>
-                <a:latin typeface="Calibri" pitchFamily="34" charset="0"/>
+                <a:latin typeface="Amiri" pitchFamily="2" charset="-78"/>
                 <a:ea typeface="Amiri" pitchFamily="2" charset="-78"/>
                 <a:cs typeface="Amiri" pitchFamily="2" charset="-78"/>
               </a:rPr>
@@ -9782,7 +9782,7 @@
                 <a:solidFill>
                   <a:srgbClr val="FFFFFF"/>
                 </a:solidFill>
-                <a:latin typeface="Calibri" pitchFamily="34" charset="0"/>
+                <a:latin typeface="Amiri" pitchFamily="2" charset="-78"/>
                 <a:ea typeface="Amiri" pitchFamily="2" charset="-78"/>
                 <a:cs typeface="Amiri" pitchFamily="2" charset="-78"/>
               </a:rPr>
@@ -10569,7 +10569,7 @@
                 <a:solidFill>
                   <a:srgbClr val="FFFFFF"/>
                 </a:solidFill>
-                <a:latin typeface="Calibri" pitchFamily="34" charset="0"/>
+                <a:latin typeface="Amiri" pitchFamily="2" charset="-78"/>
                 <a:ea typeface="Amiri" pitchFamily="2" charset="-78"/>
                 <a:cs typeface="Amiri" pitchFamily="2" charset="-78"/>
               </a:rPr>
@@ -10635,7 +10635,7 @@
                 <a:solidFill>
                   <a:srgbClr val="FFFFFF"/>
                 </a:solidFill>
-                <a:latin typeface="Calibri" pitchFamily="34" charset="0"/>
+                <a:latin typeface="Amiri" pitchFamily="2" charset="-78"/>
                 <a:ea typeface="Amiri" pitchFamily="2" charset="-78"/>
                 <a:cs typeface="Amiri" pitchFamily="2" charset="-78"/>
               </a:rPr>
@@ -10701,7 +10701,7 @@
                 <a:solidFill>
                   <a:srgbClr val="FFFFFF"/>
                 </a:solidFill>
-                <a:latin typeface="Calibri" pitchFamily="34" charset="0"/>
+                <a:latin typeface="Amiri" pitchFamily="2" charset="-78"/>
                 <a:ea typeface="Amiri" pitchFamily="2" charset="-78"/>
                 <a:cs typeface="Amiri" pitchFamily="2" charset="-78"/>
               </a:rPr>
@@ -10767,7 +10767,7 @@
                 <a:solidFill>
                   <a:srgbClr val="FFFFFF"/>
                 </a:solidFill>
-                <a:latin typeface="Calibri" pitchFamily="34" charset="0"/>
+                <a:latin typeface="Amiri" pitchFamily="2" charset="-78"/>
                 <a:ea typeface="Amiri" pitchFamily="2" charset="-78"/>
                 <a:cs typeface="Amiri" pitchFamily="2" charset="-78"/>
               </a:rPr>
